--- a/examples/figure-mockup/output/figure-mockup.pptx
+++ b/examples/figure-mockup/output/figure-mockup.pptx
@@ -1267,7 +1267,7 @@
       </p:sp>
       <p:sp>
         <p:nvSpPr>
-          <p:cNvPr id="13" name="Text 10"/>
+          <p:cNvPr id="13" name="pptx-gen-page-number"/>
           <p:cNvSpPr/>
           <p:nvPr/>
         </p:nvSpPr>
@@ -1306,7 +1306,7 @@
             <a:pPr indent="0" marL="0">
               <a:buNone/>
             </a:pPr>
-            <a:r>
+            <a:fld id="{22363F15-A922-483E-BB8C-BAF255E99A5F}" type="slidenum">
               <a:rPr lang="en-US" sz="700" dirty="0">
                 <a:solidFill>
                   <a:srgbClr val="5B6472"/>
@@ -1316,7 +1316,7 @@
                 <a:cs typeface="Inter" pitchFamily="34" charset="-120"/>
               </a:rPr>
               <a:t>1</a:t>
-            </a:r>
+            </a:fld>
             <a:endParaRPr lang="en-US" sz="700" dirty="0"/>
           </a:p>
         </p:txBody>
